--- a/public/level4/downloads/slides/Level4_Lesson3_Slides.pptx
+++ b/public/level4/downloads/slides/Level4_Lesson3_Slides.pptx
@@ -1196,7 +1196,7 @@
           </a:p>
           <a:p>
             <a:r>
-              <a:t>No speaker? Read the script with a volunteer at a natural, friendly speed, two times. Say gonna and wanna where the script has them.</a:t>
+              <a:t>No speaker? Read the script with a volunteer at a natural, friendly speed, two times. The script says going to and want to. People often say gonna and wanna; learners only need to recognize those words.</a:t>
             </a:r>
           </a:p>
           <a:p>
@@ -1261,12 +1261,12 @@
           </a:p>
           <a:p>
             <a:r>
-              <a:t>Ms. Rivera: That's OK. Are you gonna have time tonight?</a:t>
-            </a:r>
-          </a:p>
-          <a:p>
-            <a:r>
-              <a:t>Kim: I think so. I'm gonna start it after the delivery. It takes about twenty minutes.</a:t>
+              <a:t>Ms. Rivera: That's OK. Are you going to have time tonight?</a:t>
+            </a:r>
+          </a:p>
+          <a:p>
+            <a:r>
+              <a:t>Kim: I think so. I'm going to start it after the delivery. It takes about twenty minutes.</a:t>
             </a:r>
           </a:p>
           <a:p>
@@ -1286,7 +1286,7 @@
           </a:p>
           <a:p>
             <a:r>
-              <a:t>Jamal: Not yet. I'm gonna clean it before I clock out.</a:t>
+              <a:t>Jamal: Not yet. I'm going to clean it before I clock out.</a:t>
             </a:r>
           </a:p>
           <a:p>
@@ -1306,7 +1306,7 @@
           </a:p>
           <a:p>
             <a:r>
-              <a:t>Kim: Thanks. I wanna finish it this week.</a:t>
+              <a:t>Kim: Thanks. I want to finish it this week.</a:t>
             </a:r>
           </a:p>
           <a:p>
@@ -1641,7 +1641,7 @@
           <a:lstStyle/>
           <a:p>
             <a:r>
-              <a:t>"Hear it, say it" (3 min). Point to the script lines. gonna = going to: "I'm gonna clean it before I clock out." wanna = want to: "I wanna finish it this week." You can say going to and want to.</a:t>
+              <a:t>"Hear it, say it" (3 min). Point to the script lines. gonna = going to: "I'm going to clean it before I clock out." wanna = want to: "I want to finish it this week." You can say going to and want to.</a:t>
             </a:r>
           </a:p>
           <a:p>
@@ -16515,6 +16515,17 @@
               <a:buNone/>
             </a:pPr>
             <a:r>
+              <a:rPr lang="en-US" sz="2000" dirty="0" b="1">
+                <a:solidFill>
+                  <a:srgbClr val="5B3FC4"/>
+                </a:solidFill>
+                <a:latin typeface="Lexend Deca" pitchFamily="34" charset="0"/>
+                <a:ea typeface="Lexend Deca" pitchFamily="34" charset="-122"/>
+                <a:cs typeface="Lexend Deca" pitchFamily="34" charset="-120"/>
+              </a:rPr>
+              <a:t>gonna</a:t>
+            </a:r>
+            <a:r>
               <a:rPr lang="en-US" sz="2000" dirty="0">
                 <a:solidFill>
                   <a:srgbClr val="1B2236"/>
@@ -16523,7 +16534,7 @@
                 <a:ea typeface="Lexend Deca" pitchFamily="34" charset="-122"/>
                 <a:cs typeface="Lexend Deca" pitchFamily="34" charset="-120"/>
               </a:rPr>
-              <a:t>You will hear </a:t>
+              <a:t> and </a:t>
             </a:r>
             <a:r>
               <a:rPr lang="en-US" sz="2000" dirty="0" b="1">
@@ -16534,7 +16545,7 @@
                 <a:ea typeface="Lexend Deca" pitchFamily="34" charset="-122"/>
                 <a:cs typeface="Lexend Deca" pitchFamily="34" charset="-120"/>
               </a:rPr>
-              <a:t>gonna</a:t>
+              <a:t>wanna</a:t>
             </a:r>
             <a:r>
               <a:rPr lang="en-US" sz="2000" dirty="0">
@@ -16545,29 +16556,7 @@
                 <a:ea typeface="Lexend Deca" pitchFamily="34" charset="-122"/>
                 <a:cs typeface="Lexend Deca" pitchFamily="34" charset="-120"/>
               </a:rPr>
-              <a:t> and </a:t>
-            </a:r>
-            <a:r>
-              <a:rPr lang="en-US" sz="2000" dirty="0" b="1">
-                <a:solidFill>
-                  <a:srgbClr val="5B3FC4"/>
-                </a:solidFill>
-                <a:latin typeface="Lexend Deca" pitchFamily="34" charset="0"/>
-                <a:ea typeface="Lexend Deca" pitchFamily="34" charset="-122"/>
-                <a:cs typeface="Lexend Deca" pitchFamily="34" charset="-120"/>
-              </a:rPr>
-              <a:t>wanna</a:t>
-            </a:r>
-            <a:r>
-              <a:rPr lang="en-US" sz="2000" dirty="0">
-                <a:solidFill>
-                  <a:srgbClr val="1B2236"/>
-                </a:solidFill>
-                <a:latin typeface="Lexend Deca" pitchFamily="34" charset="0"/>
-                <a:ea typeface="Lexend Deca" pitchFamily="34" charset="-122"/>
-                <a:cs typeface="Lexend Deca" pitchFamily="34" charset="-120"/>
-              </a:rPr>
-              <a:t>.</a:t>
+              <a:t> are short forms. This listening uses the full forms.</a:t>
             </a:r>
             <a:endParaRPr lang="en-US" sz="2000" dirty="0"/>
           </a:p>
@@ -16777,7 +16766,7 @@
                 <a:ea typeface="Lexend Deca" pitchFamily="34" charset="-122"/>
                 <a:cs typeface="Lexend Deca" pitchFamily="34" charset="-120"/>
               </a:rPr>
-              <a:t>gonna</a:t>
+              <a:t>going to</a:t>
             </a:r>
             <a:r>
               <a:rPr lang="en-US" sz="1800" dirty="0" b="1">
@@ -16864,7 +16853,7 @@
                 <a:ea typeface="Lexend Deca" pitchFamily="34" charset="-122"/>
                 <a:cs typeface="Lexend Deca" pitchFamily="34" charset="-120"/>
               </a:rPr>
-              <a:t>wanna</a:t>
+              <a:t>want to</a:t>
             </a:r>
             <a:r>
               <a:rPr lang="en-US" sz="1800" dirty="0" b="1">

--- a/public/level4/downloads/slides/Level4_Lesson3_Slides.pptx
+++ b/public/level4/downloads/slides/Level4_Lesson3_Slides.pptx
@@ -1231,7 +1231,7 @@
           </a:p>
           <a:p>
             <a:r>
-              <a:t>Jamal: Yes, I've already restocked them. Aisles one to six are done.</a:t>
+              <a:t>Jamal: Yes, I've already restocked them. Those shelves are done.</a:t>
             </a:r>
           </a:p>
           <a:p>
@@ -1246,7 +1246,7 @@
           </a:p>
           <a:p>
             <a:r>
-              <a:t>Kim: We've already put away the milk and the eggs.</a:t>
+              <a:t>Kim: We have already put away the milk and the eggs.</a:t>
             </a:r>
           </a:p>
           <a:p>

--- a/public/level4/downloads/slides/Level4_Lesson3_Slides.pptx
+++ b/public/level4/downloads/slides/Level4_Lesson3_Slides.pptx
@@ -1191,7 +1191,7 @@
           </a:p>
           <a:p>
             <a:r>
-              <a:t>The audio (about 1:52) is coming soon. When it is ready, it plays the conversation once; press play again for play 2. Until then, read the listening script (at the end of these notes) with a volunteer.</a:t>
+              <a:t>The audio (L4_L3_listening.mp3, about 1:59) plays the conversation once. Press play again for play 2. A third play is fine if the class needs it.</a:t>
             </a:r>
           </a:p>
           <a:p>
@@ -1201,7 +1201,7 @@
           </a:p>
           <a:p>
             <a:r>
-              <a:t>Audio: the listening audio for this lesson (about 1:52) is coming soon. It will use computer-generated voices (Chatterbox TTS cloned from synthetic Kokoro-82M reference clips); no recordings of real people. Until it is ready, read the listening script (in the notes of the Before You Listen slide) with a volunteer. The names and the story are invented.</a:t>
+              <a:t>Audio: synthetic voices, computer-generated (Chatterbox TTS cloned from Kokoro-82M reference clips). No recordings of real people. The names and the story are invented.</a:t>
             </a:r>
           </a:p>
           <a:p>
@@ -1212,121 +1212,6 @@
           <a:p>
             <a:r>
               <a:t>Picture: Twemoji graphics by Twitter, Inc. and other contributors (https://github.com/jdecked/twemoji), CC BY 4.0 (https://creativecommons.org/licenses/by/4.0/); resized and combined, with signs and labels (images/CREDITS.md).</a:t>
-            </a:r>
-          </a:p>
-          <a:p>
-            <a:r>
-              <a:t>Listening script (the audio is coming soon; until then, read it aloud with a volunteer at a normal, friendly speed):</a:t>
-            </a:r>
-          </a:p>
-          <a:p>
-            <a:r>
-              <a:t>Narrator: Lesson three. It's the end of the evening shift at a grocery store. Ms. Rivera, the supervisor, talks to Jamal and Kim.</a:t>
-            </a:r>
-          </a:p>
-          <a:p>
-            <a:r>
-              <a:t>Ms. Rivera: OK, team, it's almost nine. Let's look at the checklist. Jamal, have you restocked the shelves yet?</a:t>
-            </a:r>
-          </a:p>
-          <a:p>
-            <a:r>
-              <a:t>Jamal: Yes, I've already restocked them. Those shelves are done.</a:t>
-            </a:r>
-          </a:p>
-          <a:p>
-            <a:r>
-              <a:t>Ms. Rivera: Great. And the delivery? Has the truck arrived yet?</a:t>
-            </a:r>
-          </a:p>
-          <a:p>
-            <a:r>
-              <a:t>Jamal: Yes, it's just arrived. Kim and I are putting it away.</a:t>
-            </a:r>
-          </a:p>
-          <a:p>
-            <a:r>
-              <a:t>Kim: We have already put away the milk and the eggs.</a:t>
-            </a:r>
-          </a:p>
-          <a:p>
-            <a:r>
-              <a:t>Ms. Rivera: Good. Kim, have you cleaned the cooler yet?</a:t>
-            </a:r>
-          </a:p>
-          <a:p>
-            <a:r>
-              <a:t>Kim: No, not yet. I haven't cleaned it yet. The delivery came late.</a:t>
-            </a:r>
-          </a:p>
-          <a:p>
-            <a:r>
-              <a:t>Ms. Rivera: That's OK. Are you going to have time tonight?</a:t>
-            </a:r>
-          </a:p>
-          <a:p>
-            <a:r>
-              <a:t>Kim: I think so. I'm going to start it after the delivery. It takes about twenty minutes.</a:t>
-            </a:r>
-          </a:p>
-          <a:p>
-            <a:r>
-              <a:t>Ms. Rivera: Perfect. Jamal, have you checked the bakery inventory?</a:t>
-            </a:r>
-          </a:p>
-          <a:p>
-            <a:r>
-              <a:t>Jamal: I've just finished it. I gave you the list at eight.</a:t>
-            </a:r>
-          </a:p>
-          <a:p>
-            <a:r>
-              <a:t>Ms. Rivera: Oh, right, I have it here. Thanks. And the break room?</a:t>
-            </a:r>
-          </a:p>
-          <a:p>
-            <a:r>
-              <a:t>Jamal: Not yet. I'm going to clean it before I clock out.</a:t>
-            </a:r>
-          </a:p>
-          <a:p>
-            <a:r>
-              <a:t>Ms. Rivera: OK. So the cooler and the break room aren't done yet. Everything else is done.</a:t>
-            </a:r>
-          </a:p>
-          <a:p>
-            <a:r>
-              <a:t>Kim: Ms. Rivera, have you seen the new training schedule yet?</a:t>
-            </a:r>
-          </a:p>
-          <a:p>
-            <a:r>
-              <a:t>Ms. Rivera: Yes, I've just seen it. The deadline for the safety training is Friday.</a:t>
-            </a:r>
-          </a:p>
-          <a:p>
-            <a:r>
-              <a:t>Kim: Thanks. I want to finish it this week.</a:t>
-            </a:r>
-          </a:p>
-          <a:p>
-            <a:r>
-              <a:t>Ms. Rivera: Good idea. And some quick feedback: you both did great work tonight. The shelves look really good.</a:t>
-            </a:r>
-          </a:p>
-          <a:p>
-            <a:r>
-              <a:t>Jamal: Thank you!</a:t>
-            </a:r>
-          </a:p>
-          <a:p>
-            <a:r>
-              <a:t>Kim: Thanks, Ms. Rivera. See you tomorrow.</a:t>
-            </a:r>
-          </a:p>
-          <a:p>
-            <a:r>
-              <a:t>Narrator: That's the end of the listening.</a:t>
             </a:r>
           </a:p>
         </p:txBody>
@@ -2831,7 +2716,7 @@
           </a:p>
           <a:p>
             <a:r>
-              <a:t>Audio: the listening audio for this lesson (about 1:52) is coming soon. It will use computer-generated voices (Chatterbox TTS cloned from synthetic Kokoro-82M reference clips); no recordings of real people. Until it is ready, read the listening script (in the notes of the Before You Listen slide) with a volunteer. The names and the story are invented.</a:t>
+              <a:t>Audio: synthetic voices, computer-generated (Chatterbox TTS cloned from Kokoro-82M reference clips). No recordings of real people. The names and the story are invented.</a:t>
             </a:r>
           </a:p>
           <a:p>
@@ -12145,7 +12030,7 @@
                 <a:ea typeface="Lexend Deca" pitchFamily="34" charset="-122"/>
                 <a:cs typeface="Lexend Deca" pitchFamily="34" charset="-120"/>
               </a:rPr>
-              <a:t>Audio (about 1:52): coming soon.</a:t>
+              <a:t>Audio: about 1:59. It plays once.</a:t>
             </a:r>
             <a:endParaRPr lang="en-US" sz="2200" dirty="0"/>
           </a:p>
@@ -31838,7 +31723,7 @@
                 <a:ea typeface="Lexend Deca" pitchFamily="34" charset="-122"/>
                 <a:cs typeface="Lexend Deca" pitchFamily="34" charset="-120"/>
               </a:rPr>
-              <a:t>Audio (coming soon): synthetic voices made with Chatterbox TTS (MIT License), cloned from short synthetic reference clips made with Kokoro-82M (Apache License 2.0). No recordings of real people. Each file will carry an inaudible Perth watermark marking it as AI-generated. Font: Lexend Deca (OFL 1.1).</a:t>
+              <a:t>Audio: synthetic voices made with Chatterbox TTS (MIT License), cloned from short synthetic reference clips made with Kokoro-82M (Apache License 2.0). No recordings of real people were used. Each file carries an inaudible Perth watermark marking it as AI-generated. Font: Lexend Deca (OFL 1.1).</a:t>
             </a:r>
             <a:endParaRPr lang="en-US" sz="1350" dirty="0" b="0"/>
           </a:p>

--- a/public/level4/downloads/slides/Level4_Lesson3_Slides.pptx
+++ b/public/level4/downloads/slides/Level4_Lesson3_Slides.pptx
@@ -1537,6 +1537,11 @@
           <a:p>
             <a:r>
               <a:t>'s = has: It's just arrived. She's already left. Ask: "is or has?" If a past participle comes next, it is has.</a:t>
+            </a:r>
+          </a:p>
+          <a:p>
+            <a:r>
+              <a:t>Everyday English: people often say gonna (going to) and wanna (want to). Learners will hear them often. They are fine in casual talk; in writing, at a job interview, or in a formal email, use going to and want to. The listening uses the full forms.</a:t>
             </a:r>
           </a:p>
           <a:p>
@@ -16419,7 +16424,7 @@
                 <a:ea typeface="Lexend Deca" pitchFamily="34" charset="-122"/>
                 <a:cs typeface="Lexend Deca" pitchFamily="34" charset="-120"/>
               </a:rPr>
-              <a:t> and </a:t>
+              <a:t> = going to, </a:t>
             </a:r>
             <a:r>
               <a:rPr lang="en-US" sz="2000" dirty="0" b="1">
@@ -16441,7 +16446,7 @@
                 <a:ea typeface="Lexend Deca" pitchFamily="34" charset="-122"/>
                 <a:cs typeface="Lexend Deca" pitchFamily="34" charset="-120"/>
               </a:rPr>
-              <a:t> are short forms. This listening uses the full forms.</a:t>
+              <a:t> = want to: fine in everyday talk.</a:t>
             </a:r>
             <a:endParaRPr lang="en-US" sz="2000" dirty="0"/>
           </a:p>
